--- a/Presentation/MindShield_Interim_Report.pptx
+++ b/Presentation/MindShield_Interim_Report.pptx
@@ -9325,7 +9325,7 @@
                 </a:solidFill>
                 <a:latin typeface="Calibri"/>
               </a:rPr>
-              <a:t>Fix GPT-4o error rows; scale the dataset toward the 5,000-patient target</a:t>
+              <a:t>Fix GPT-4o error rows; scale the synthetic dataset further</a:t>
             </a:r>
           </a:p>
         </p:txBody>
